--- a/modulo-2/PF1822-desarrollo-con-ia/produccion/videos/AE1-capsula.pptx
+++ b/modulo-2/PF1822-desarrollo-con-ia/produccion/videos/AE1-capsula.pptx
@@ -18,6 +18,7 @@
     <p:sldId id="263" r:id="rId17"/>
     <p:sldId id="264" r:id="rId18"/>
     <p:sldId id="265" r:id="rId19"/>
+    <p:sldId id="266" r:id="rId20"/>
   </p:sldIdLst>
   <p:sldSz cx="12192000" cy="6858000"/>
   <p:notesSz cx="6858000" cy="9144000"/>
@@ -161,7 +162,7 @@
           <a:p>
             <a:r>
               <a:rPr lang="es-CL" dirty="0"/>
-              <a:t>Te doy la bienvenida a la cápsula 1 del módulo 2: Modelos generativos y su ecosistema. "Qué hace un modelo generativo y dónde encaja en una aplicación". El caso: el resumidor de tickets de Nube Sur.</a:t>
+              <a:t>Te doy la bienvenida a la cápsula 1 del módulo 2, Introducción a modelos generativos y consumo por API: Modelos generativos y su ecosistema. "Qué hace un modelo generativo y dónde encaja en una aplicación". El caso: el resumidor de tickets de Nube Sur.</a:t>
             </a:r>
           </a:p>
         </p:txBody>
@@ -220,6 +221,65 @@
           <a:p>
             <a:r>
               <a:rPr lang="es-CL" dirty="0"/>
+              <a:t>Elegir una arquitectura. Criterios: escalabilidad (¿aguanta 10 veces más tickets?), seguridad (¿dónde están la clave y los datos personales?), costo (tokens por ticket) y mantenimiento (¿se puede cambiar de modelo sin reescribir todo?).</a:t>
+            </a:r>
+          </a:p>
+        </p:txBody>
+      </p:sp>
+    </p:spTree>
+  </p:cSld>
+  <p:clrMapOvr>
+    <a:masterClrMapping/>
+  </p:clrMapOvr>
+</p:notes>
+</file>
+
+<file path=ppt/notesSlides/notesSlide11.xml><?xml version="1.0" encoding="utf-8"?>
+<p:notes xmlns:a="http://schemas.openxmlformats.org/drawingml/2006/main" xmlns:r="http://schemas.openxmlformats.org/officeDocument/2006/relationships" xmlns:p="http://schemas.openxmlformats.org/presentationml/2006/main">
+  <p:cSld>
+    <p:spTree>
+      <p:nvGrpSpPr>
+        <p:cNvPr id="1" name=""/>
+        <p:cNvGrpSpPr/>
+        <p:nvPr/>
+      </p:nvGrpSpPr>
+      <p:grpSpPr>
+        <a:xfrm>
+          <a:off x="0" y="0"/>
+          <a:ext cx="0" cy="0"/>
+          <a:chOff x="0" y="0"/>
+          <a:chExt cx="0" cy="0"/>
+        </a:xfrm>
+      </p:grpSpPr>
+      <p:sp>
+        <p:nvSpPr>
+          <p:cNvPr id="2" name="Imagen de diapositiva"/>
+          <p:cNvSpPr>
+            <a:spLocks noGrp="1" noRot="1" noChangeAspect="1"/>
+          </p:cNvSpPr>
+          <p:nvPr>
+            <p:ph type="sldImg"/>
+          </p:nvPr>
+        </p:nvSpPr>
+        <p:spPr/>
+      </p:sp>
+      <p:sp>
+        <p:nvSpPr>
+          <p:cNvPr id="3" name="Notas"/>
+          <p:cNvSpPr>
+            <a:spLocks noGrp="1"/>
+          </p:cNvSpPr>
+          <p:nvPr>
+            <p:ph type="body" idx="1"/>
+          </p:nvPr>
+        </p:nvSpPr>
+        <p:spPr/>
+        <p:txBody>
+          <a:bodyPr/>
+          <a:lstStyle/>
+          <a:p>
+            <a:r>
+              <a:rPr lang="es-CL" dirty="0"/>
               <a:t>Tu tarea. Diagrama del resumidor y su justificación: actividad 1, parte A.</a:t>
             </a:r>
           </a:p>
@@ -279,7 +339,7 @@
           <a:p>
             <a:r>
               <a:rPr lang="es-CL" dirty="0"/>
-              <a:t>IA generativa frente a IA tradicional. La IA tradicional basada en reglas decide con condiciones escritas por personas; la generativa produce contenido nuevo (texto, código, imágenes) aprendido de datos.</a:t>
+              <a:t>Esta cápsula corresponde al aprendizaje esperado 1 del plan formativo: Analizar el rol de los modelos generativos en el desarrollo de aplicaciones, describiendo sus tipos, casos de uso, tecnologías asociadas y representando arquitecturas funcionales que integren estos modelos mediante APIs. Sus criterios de evaluación son: Clasifica los tipos de modelos generativos identificando sus características y aplicaciones más frecuentes en la organización. Representa un diagrama funcional de una aplicación con IA generativa, explicando la función de cada componente dentro de la arquitectura. Analiza la elección de la arquitectura en función de criterios como escalabilidad, seguridad o mantenimiento.</a:t>
             </a:r>
           </a:p>
         </p:txBody>
@@ -338,7 +398,7 @@
           <a:p>
             <a:r>
               <a:rPr lang="es-CL" dirty="0"/>
-              <a:t>Tipos por lo que generan. Texto, imagen, audio y video.</a:t>
+              <a:t>IA generativa frente a IA tradicional. La IA tradicional basada en reglas decide con condiciones escritas por personas; la generativa produce contenido nuevo (texto, código, imágenes) aprendido de datos.</a:t>
             </a:r>
           </a:p>
         </p:txBody>
@@ -397,7 +457,7 @@
           <a:p>
             <a:r>
               <a:rPr lang="es-CL" dirty="0"/>
-              <a:t>Familias técnicas. Autorregresivos: generan token a token (texto y código). De difusión: parten de ruido y lo refinan (imágenes, audio). Transformers: la arquitectura detrás de la mayoría de los modelos de lenguaje actuales. Ver el cuadro.</a:t>
+              <a:t>Tipos por lo que generan. Texto, imagen, audio y video.</a:t>
             </a:r>
           </a:p>
         </p:txBody>
@@ -456,7 +516,7 @@
           <a:p>
             <a:r>
               <a:rPr lang="es-CL" dirty="0"/>
-              <a:t>Casos de uso. Generación de texto y de código, síntesis de imágenes, preguntas y respuestas, resúmenes, generación de pruebas.</a:t>
+              <a:t>Familias técnicas. Autorregresivos: generan token a token (texto y código). De difusión: parten de ruido y lo refinan (imágenes, audio). Transformers: la arquitectura detrás de la mayoría de los modelos de lenguaje actuales. Ver el cuadro.</a:t>
             </a:r>
           </a:p>
         </p:txBody>
@@ -515,7 +575,7 @@
           <a:p>
             <a:r>
               <a:rPr lang="es-CL" dirty="0"/>
-              <a:t>Arquitecturas. Solicitud–respuesta (una llamada, una respuesta) y pipelines (varias etapas encadenadas: limpiar, luego generar, luego evaluar, luego guardar).</a:t>
+              <a:t>Casos de uso. Generación de texto y de código, síntesis de imágenes, preguntas y respuestas, resúmenes, generación de pruebas.</a:t>
             </a:r>
           </a:p>
         </p:txBody>
@@ -574,7 +634,7 @@
           <a:p>
             <a:r>
               <a:rPr lang="es-CL" dirty="0"/>
-              <a:t>Componentes. Cliente, servidor API, módulo de preprocesamiento, modelo de IA, base de datos o vector store. Flujo de datos de extremo a extremo con el ticket de ejemplo.</a:t>
+              <a:t>Arquitecturas. Solicitud–respuesta (una llamada, una respuesta) y pipelines (varias etapas encadenadas: limpiar, luego generar, luego evaluar, luego guardar).</a:t>
             </a:r>
           </a:p>
         </p:txBody>
@@ -633,7 +693,7 @@
           <a:p>
             <a:r>
               <a:rPr lang="es-CL" dirty="0"/>
-              <a:t>Tecnologías y bibliotecas. API de OpenAI, Hugging Face Transformers, TensorFlow, PyTorch, LangChain, Diffusers: qué resuelve cada una y en qué módulo del plan se vuelve a ver.</a:t>
+              <a:t>Componentes. Cliente, servidor API, módulo de preprocesamiento, modelo de IA, base de datos o vector store. Flujo de datos de extremo a extremo con el ticket de ejemplo.</a:t>
             </a:r>
           </a:p>
         </p:txBody>
@@ -692,7 +752,7 @@
           <a:p>
             <a:r>
               <a:rPr lang="es-CL" dirty="0"/>
-              <a:t>Elegir una arquitectura. Criterios: escalabilidad (¿aguanta 10 veces más tickets?), seguridad (¿dónde están la clave y los datos personales?), costo (tokens por ticket) y mantenimiento (¿se puede cambiar de modelo sin reescribir todo?).</a:t>
+              <a:t>Tecnologías y bibliotecas. API de OpenAI, Hugging Face Transformers, TensorFlow, PyTorch, LangChain, Diffusers: qué resuelve cada una y en qué módulo del plan se vuelve a ver.</a:t>
             </a:r>
           </a:p>
         </p:txBody>
@@ -841,6 +901,39 @@
       </p:sp>
       <p:sp>
         <p:nvSpPr>
+          <p:cNvPr id="7" name="Etiqueta"/>
+          <p:cNvSpPr txBox="1"/>
+          <p:nvPr/>
+        </p:nvSpPr>
+        <p:spPr>
+          <a:xfrm>
+            <a:off x="609600" y="609600"/>
+            <a:ext cx="7315200" cy="533400"/>
+          </a:xfrm>
+          <a:prstGeom prst="rect">
+            <a:avLst/>
+          </a:prstGeom>
+          <a:noFill/>
+        </p:spPr>
+        <p:txBody>
+          <a:bodyPr wrap="square" lIns="0" rIns="0" anchor="b">
+            <a:normAutofit/>
+          </a:bodyPr>
+          <a:lstStyle/>
+          <a:p>
+            <a:r>
+              <a:rPr lang="es-CL" sz="1200" b="1" dirty="0">
+                <a:solidFill>
+                  <a:srgbClr val="9FC3E6"/>
+                </a:solidFill>
+              </a:rPr>
+              <a:t>MÓDULO 2 · INTRODUCCIÓN A MODELOS GENERATIVOS Y CONSUMO POR API</a:t>
+            </a:r>
+          </a:p>
+        </p:txBody>
+      </p:sp>
+      <p:sp>
+        <p:nvSpPr>
           <p:cNvPr id="4" name="Título"/>
           <p:cNvSpPr txBox="1"/>
           <p:nvPr/>
@@ -903,6 +996,16 @@
               <a:t>"Qué hace un modelo generativo y dónde encaja en una aplicación". El caso: el resumidor de tickets de Nube Sur.</a:t>
             </a:r>
           </a:p>
+          <a:p>
+            <a:r>
+              <a:rPr lang="es-CL" sz="2200" dirty="0">
+                <a:solidFill>
+                  <a:srgbClr val="E5E7EB"/>
+                </a:solidFill>
+              </a:rPr>
+              <a:t>Contenido del plan: 1. MODELOS GENERATIVOS Y ECOSISTEMA TECNOLÓGICO</a:t>
+            </a:r>
+          </a:p>
         </p:txBody>
       </p:sp>
       <p:sp>
@@ -933,7 +1036,7 @@
                   <a:srgbClr val="CBD5E1"/>
                 </a:solidFill>
               </a:rPr>
-              <a:t>PF1822 · Módulo 2 · Cápsula 1 · AE1</a:t>
+              <a:t>PF1822 · Módulo 2 · Cápsula 1 · Aprendizaje esperado 1</a:t>
             </a:r>
           </a:p>
         </p:txBody>
@@ -987,14 +1090,57 @@
       </p:sp>
       <p:sp>
         <p:nvSpPr>
+          <p:cNvPr id="7" name="Etiqueta"/>
+          <p:cNvSpPr txBox="1"/>
+          <p:nvPr/>
+        </p:nvSpPr>
+        <p:spPr>
+          <a:xfrm>
+            <a:off x="609600" y="228600"/>
+            <a:ext cx="7315200" cy="914400"/>
+          </a:xfrm>
+          <a:prstGeom prst="rect">
+            <a:avLst/>
+          </a:prstGeom>
+          <a:noFill/>
+        </p:spPr>
+        <p:txBody>
+          <a:bodyPr wrap="square" lIns="0" rIns="0" anchor="b">
+            <a:normAutofit/>
+          </a:bodyPr>
+          <a:lstStyle/>
+          <a:p>
+            <a:r>
+              <a:rPr lang="es-CL" sz="1200" b="1" dirty="0">
+                <a:solidFill>
+                  <a:srgbClr val="0E7490"/>
+                </a:solidFill>
+              </a:rPr>
+              <a:t>CONTENIDO DEL PLAN (TEXTUAL)</a:t>
+            </a:r>
+          </a:p>
+          <a:p>
+            <a:r>
+              <a:rPr lang="es-CL" sz="1200" b="1" dirty="0">
+                <a:solidFill>
+                  <a:srgbClr val="0F3D5E"/>
+                </a:solidFill>
+              </a:rPr>
+              <a:t>ARQUITECTURAS: REQUEST–RESPONSE Y PIPELINES.</a:t>
+            </a:r>
+          </a:p>
+        </p:txBody>
+      </p:sp>
+      <p:sp>
+        <p:nvSpPr>
           <p:cNvPr id="3" name="Título"/>
           <p:cNvSpPr txBox="1"/>
           <p:nvPr/>
         </p:nvSpPr>
         <p:spPr>
           <a:xfrm>
-            <a:off x="609600" y="381000"/>
-            <a:ext cx="7315200" cy="990600"/>
+            <a:off x="609600" y="1181100"/>
+            <a:ext cx="7315200" cy="685800"/>
           </a:xfrm>
           <a:prstGeom prst="rect">
             <a:avLst/>
@@ -1008,12 +1154,12 @@
           <a:lstStyle/>
           <a:p>
             <a:r>
-              <a:rPr lang="es-CL" sz="3200" b="1" dirty="0">
+              <a:rPr lang="es-CL" sz="2800" b="1" dirty="0">
                 <a:solidFill>
                   <a:srgbClr val="0F3D5E"/>
                 </a:solidFill>
               </a:rPr>
-              <a:t>Tu tarea</a:t>
+              <a:t>Elegir una arquitectura</a:t>
             </a:r>
           </a:p>
         </p:txBody>
@@ -1026,7 +1172,7 @@
         </p:nvSpPr>
         <p:spPr>
           <a:xfrm>
-            <a:off x="609600" y="1447800"/>
+            <a:off x="609600" y="1943100"/>
             <a:ext cx="1066800" cy="50800"/>
           </a:xfrm>
           <a:prstGeom prst="rect">
@@ -1048,8 +1194,8 @@
         </p:nvSpPr>
         <p:spPr>
           <a:xfrm>
-            <a:off x="609600" y="1676400"/>
-            <a:ext cx="7315200" cy="4419600"/>
+            <a:off x="609600" y="2095500"/>
+            <a:ext cx="7315200" cy="4000500"/>
           </a:xfrm>
           <a:prstGeom prst="rect">
             <a:avLst/>
@@ -1073,12 +1219,76 @@
               <a:buChar char="•"/>
             </a:pPr>
             <a:r>
-              <a:rPr lang="es-CL" sz="2400" dirty="0">
+              <a:rPr lang="es-CL" sz="2000" dirty="0">
                 <a:solidFill>
                   <a:srgbClr val="1F2937"/>
                 </a:solidFill>
               </a:rPr>
-              <a:t>Diagrama del resumidor y su justificación: actividad 1, parte A.</a:t>
+              <a:t>Criterios: </a:t>
+            </a:r>
+            <a:r>
+              <a:rPr lang="es-CL" sz="2000" b="1" dirty="0">
+                <a:solidFill>
+                  <a:srgbClr val="1F2937"/>
+                </a:solidFill>
+              </a:rPr>
+              <a:t>escalabilidad</a:t>
+            </a:r>
+            <a:r>
+              <a:rPr lang="es-CL" sz="2000" dirty="0">
+                <a:solidFill>
+                  <a:srgbClr val="1F2937"/>
+                </a:solidFill>
+              </a:rPr>
+              <a:t> (¿aguanta 10 veces más tickets?), </a:t>
+            </a:r>
+            <a:r>
+              <a:rPr lang="es-CL" sz="2000" b="1" dirty="0">
+                <a:solidFill>
+                  <a:srgbClr val="1F2937"/>
+                </a:solidFill>
+              </a:rPr>
+              <a:t>seguridad</a:t>
+            </a:r>
+            <a:r>
+              <a:rPr lang="es-CL" sz="2000" dirty="0">
+                <a:solidFill>
+                  <a:srgbClr val="1F2937"/>
+                </a:solidFill>
+              </a:rPr>
+              <a:t> (¿dónde están la clave y los datos personales?), </a:t>
+            </a:r>
+            <a:r>
+              <a:rPr lang="es-CL" sz="2000" b="1" dirty="0">
+                <a:solidFill>
+                  <a:srgbClr val="1F2937"/>
+                </a:solidFill>
+              </a:rPr>
+              <a:t>costo</a:t>
+            </a:r>
+            <a:r>
+              <a:rPr lang="es-CL" sz="2000" dirty="0">
+                <a:solidFill>
+                  <a:srgbClr val="1F2937"/>
+                </a:solidFill>
+              </a:rPr>
+              <a:t> (tokens por ticket) y </a:t>
+            </a:r>
+            <a:r>
+              <a:rPr lang="es-CL" sz="2000" b="1" dirty="0">
+                <a:solidFill>
+                  <a:srgbClr val="1F2937"/>
+                </a:solidFill>
+              </a:rPr>
+              <a:t>mantenimiento</a:t>
+            </a:r>
+            <a:r>
+              <a:rPr lang="es-CL" sz="2000" dirty="0">
+                <a:solidFill>
+                  <a:srgbClr val="1F2937"/>
+                </a:solidFill>
+              </a:rPr>
+              <a:t> (¿se puede cambiar de modelo sin reescribir todo?).</a:t>
             </a:r>
           </a:p>
         </p:txBody>
@@ -1111,7 +1321,218 @@
                   <a:srgbClr val="6B7280"/>
                 </a:solidFill>
               </a:rPr>
-              <a:t>PF1822 · Módulo 2 · Cápsula 1 · AE1</a:t>
+              <a:t>PF1822 · Módulo 2 · Cápsula 1 · Aprendizaje esperado 1</a:t>
+            </a:r>
+          </a:p>
+        </p:txBody>
+      </p:sp>
+    </p:spTree>
+  </p:cSld>
+  <p:clrMapOvr>
+    <a:masterClrMapping/>
+  </p:clrMapOvr>
+</p:sld>
+</file>
+
+<file path=ppt/slides/slide11.xml><?xml version="1.0" encoding="utf-8"?>
+<p:sld xmlns:a="http://schemas.openxmlformats.org/drawingml/2006/main" xmlns:r="http://schemas.openxmlformats.org/officeDocument/2006/relationships" xmlns:p="http://schemas.openxmlformats.org/presentationml/2006/main">
+  <p:cSld>
+    <p:spTree>
+      <p:nvGrpSpPr>
+        <p:cNvPr id="1" name=""/>
+        <p:cNvGrpSpPr/>
+        <p:nvPr/>
+      </p:nvGrpSpPr>
+      <p:grpSpPr>
+        <a:xfrm>
+          <a:off x="0" y="0"/>
+          <a:ext cx="0" cy="0"/>
+          <a:chOff x="0" y="0"/>
+          <a:chExt cx="0" cy="0"/>
+        </a:xfrm>
+      </p:grpSpPr>
+      <p:sp>
+        <p:nvSpPr>
+          <p:cNvPr id="2" name="Franja 2"/>
+          <p:cNvSpPr/>
+          <p:nvPr/>
+        </p:nvSpPr>
+        <p:spPr>
+          <a:xfrm>
+            <a:off x="0" y="0"/>
+            <a:ext cx="12192000" cy="152400"/>
+          </a:xfrm>
+          <a:prstGeom prst="rect">
+            <a:avLst/>
+          </a:prstGeom>
+          <a:solidFill>
+            <a:srgbClr val="0E7490"/>
+          </a:solidFill>
+          <a:ln>
+            <a:noFill/>
+          </a:ln>
+        </p:spPr>
+      </p:sp>
+      <p:sp>
+        <p:nvSpPr>
+          <p:cNvPr id="7" name="Etiqueta"/>
+          <p:cNvSpPr txBox="1"/>
+          <p:nvPr/>
+        </p:nvSpPr>
+        <p:spPr>
+          <a:xfrm>
+            <a:off x="609600" y="228600"/>
+            <a:ext cx="7315200" cy="914400"/>
+          </a:xfrm>
+          <a:prstGeom prst="rect">
+            <a:avLst/>
+          </a:prstGeom>
+          <a:noFill/>
+        </p:spPr>
+        <p:txBody>
+          <a:bodyPr wrap="square" lIns="0" rIns="0" anchor="b">
+            <a:normAutofit/>
+          </a:bodyPr>
+          <a:lstStyle/>
+          <a:p>
+            <a:r>
+              <a:rPr lang="es-CL" sz="1200" b="1" dirty="0">
+                <a:solidFill>
+                  <a:srgbClr val="0E7490"/>
+                </a:solidFill>
+              </a:rPr>
+              <a:t>PRÁCTICA DEL APRENDIZAJE ESPERADO 1</a:t>
+            </a:r>
+          </a:p>
+        </p:txBody>
+      </p:sp>
+      <p:sp>
+        <p:nvSpPr>
+          <p:cNvPr id="3" name="Título"/>
+          <p:cNvSpPr txBox="1"/>
+          <p:nvPr/>
+        </p:nvSpPr>
+        <p:spPr>
+          <a:xfrm>
+            <a:off x="609600" y="1181100"/>
+            <a:ext cx="7315200" cy="685800"/>
+          </a:xfrm>
+          <a:prstGeom prst="rect">
+            <a:avLst/>
+          </a:prstGeom>
+          <a:noFill/>
+        </p:spPr>
+        <p:txBody>
+          <a:bodyPr wrap="square" lIns="0" rIns="0" anchor="b">
+            <a:normAutofit/>
+          </a:bodyPr>
+          <a:lstStyle/>
+          <a:p>
+            <a:r>
+              <a:rPr lang="es-CL" sz="2800" b="1" dirty="0">
+                <a:solidFill>
+                  <a:srgbClr val="0F3D5E"/>
+                </a:solidFill>
+              </a:rPr>
+              <a:t>Tu tarea</a:t>
+            </a:r>
+          </a:p>
+        </p:txBody>
+      </p:sp>
+      <p:sp>
+        <p:nvSpPr>
+          <p:cNvPr id="4" name="Franja 4"/>
+          <p:cNvSpPr/>
+          <p:nvPr/>
+        </p:nvSpPr>
+        <p:spPr>
+          <a:xfrm>
+            <a:off x="609600" y="1943100"/>
+            <a:ext cx="1066800" cy="50800"/>
+          </a:xfrm>
+          <a:prstGeom prst="rect">
+            <a:avLst/>
+          </a:prstGeom>
+          <a:solidFill>
+            <a:srgbClr val="F59E0B"/>
+          </a:solidFill>
+          <a:ln>
+            <a:noFill/>
+          </a:ln>
+        </p:spPr>
+      </p:sp>
+      <p:sp>
+        <p:nvSpPr>
+          <p:cNvPr id="5" name="Contenido"/>
+          <p:cNvSpPr txBox="1"/>
+          <p:nvPr/>
+        </p:nvSpPr>
+        <p:spPr>
+          <a:xfrm>
+            <a:off x="609600" y="2095500"/>
+            <a:ext cx="7315200" cy="4000500"/>
+          </a:xfrm>
+          <a:prstGeom prst="rect">
+            <a:avLst/>
+          </a:prstGeom>
+          <a:noFill/>
+        </p:spPr>
+        <p:txBody>
+          <a:bodyPr wrap="square" lIns="0" rIns="0" anchor="t">
+            <a:normAutofit/>
+          </a:bodyPr>
+          <a:lstStyle/>
+          <a:p>
+            <a:pPr marL="342900" indent="-342900">
+              <a:spcBef>
+                <a:spcPts val="900"/>
+              </a:spcBef>
+              <a:buClr>
+                <a:srgbClr val="0E7490"/>
+              </a:buClr>
+              <a:buFont typeface="Arial"/>
+              <a:buChar char="•"/>
+            </a:pPr>
+            <a:r>
+              <a:rPr lang="es-CL" sz="2400" dirty="0">
+                <a:solidFill>
+                  <a:srgbClr val="1F2937"/>
+                </a:solidFill>
+              </a:rPr>
+              <a:t>Diagrama del resumidor y su justificación: actividad 1, parte A.</a:t>
+            </a:r>
+          </a:p>
+        </p:txBody>
+      </p:sp>
+      <p:sp>
+        <p:nvSpPr>
+          <p:cNvPr id="6" name="Pie"/>
+          <p:cNvSpPr txBox="1"/>
+          <p:nvPr/>
+        </p:nvSpPr>
+        <p:spPr>
+          <a:xfrm>
+            <a:off x="609600" y="6248400"/>
+            <a:ext cx="7315200" cy="381000"/>
+          </a:xfrm>
+          <a:prstGeom prst="rect">
+            <a:avLst/>
+          </a:prstGeom>
+          <a:noFill/>
+        </p:spPr>
+        <p:txBody>
+          <a:bodyPr wrap="square" lIns="0" rIns="0" anchor="t">
+            <a:normAutofit/>
+          </a:bodyPr>
+          <a:lstStyle/>
+          <a:p>
+            <a:r>
+              <a:rPr lang="es-CL" sz="1200" dirty="0">
+                <a:solidFill>
+                  <a:srgbClr val="6B7280"/>
+                </a:solidFill>
+              </a:rPr>
+              <a:t>PF1822 · Módulo 2 · Cápsula 1 · Aprendizaje esperado 1</a:t>
             </a:r>
           </a:p>
         </p:txBody>
@@ -1165,14 +1586,47 @@
       </p:sp>
       <p:sp>
         <p:nvSpPr>
+          <p:cNvPr id="7" name="Etiqueta"/>
+          <p:cNvSpPr txBox="1"/>
+          <p:nvPr/>
+        </p:nvSpPr>
+        <p:spPr>
+          <a:xfrm>
+            <a:off x="609600" y="228600"/>
+            <a:ext cx="7315200" cy="914400"/>
+          </a:xfrm>
+          <a:prstGeom prst="rect">
+            <a:avLst/>
+          </a:prstGeom>
+          <a:noFill/>
+        </p:spPr>
+        <p:txBody>
+          <a:bodyPr wrap="square" lIns="0" rIns="0" anchor="b">
+            <a:normAutofit/>
+          </a:bodyPr>
+          <a:lstStyle/>
+          <a:p>
+            <a:r>
+              <a:rPr lang="es-CL" sz="1200" b="1" dirty="0">
+                <a:solidFill>
+                  <a:srgbClr val="0E7490"/>
+                </a:solidFill>
+              </a:rPr>
+              <a:t>APRENDIZAJE Y CRITERIOS TEXTUALES DEL PLAN FORMATIVO</a:t>
+            </a:r>
+          </a:p>
+        </p:txBody>
+      </p:sp>
+      <p:sp>
+        <p:nvSpPr>
           <p:cNvPr id="3" name="Título"/>
           <p:cNvSpPr txBox="1"/>
           <p:nvPr/>
         </p:nvSpPr>
         <p:spPr>
           <a:xfrm>
-            <a:off x="609600" y="381000"/>
-            <a:ext cx="7315200" cy="990600"/>
+            <a:off x="609600" y="1181100"/>
+            <a:ext cx="7315200" cy="685800"/>
           </a:xfrm>
           <a:prstGeom prst="rect">
             <a:avLst/>
@@ -1186,12 +1640,12 @@
           <a:lstStyle/>
           <a:p>
             <a:r>
-              <a:rPr lang="es-CL" sz="3200" b="1" dirty="0">
+              <a:rPr lang="es-CL" sz="2800" b="1" dirty="0">
                 <a:solidFill>
                   <a:srgbClr val="0F3D5E"/>
                 </a:solidFill>
               </a:rPr>
-              <a:t>IA generativa frente a IA tradicional</a:t>
+              <a:t>Aprendizaje esperado 1</a:t>
             </a:r>
           </a:p>
         </p:txBody>
@@ -1204,7 +1658,7 @@
         </p:nvSpPr>
         <p:spPr>
           <a:xfrm>
-            <a:off x="609600" y="1447800"/>
+            <a:off x="609600" y="1943100"/>
             <a:ext cx="1066800" cy="50800"/>
           </a:xfrm>
           <a:prstGeom prst="rect">
@@ -1226,8 +1680,8 @@
         </p:nvSpPr>
         <p:spPr>
           <a:xfrm>
-            <a:off x="609600" y="1676400"/>
-            <a:ext cx="7315200" cy="4419600"/>
+            <a:off x="609600" y="2095500"/>
+            <a:ext cx="7315200" cy="4000500"/>
           </a:xfrm>
           <a:prstGeom prst="rect">
             <a:avLst/>
@@ -1251,28 +1705,88 @@
               <a:buChar char="•"/>
             </a:pPr>
             <a:r>
-              <a:rPr lang="es-CL" sz="2400" dirty="0">
+              <a:rPr lang="es-CL" sz="1400" b="1" dirty="0">
                 <a:solidFill>
                   <a:srgbClr val="1F2937"/>
                 </a:solidFill>
               </a:rPr>
-              <a:t>La IA tradicional basada en reglas decide con condiciones escritas por personas; la generativa </a:t>
-            </a:r>
-            <a:r>
-              <a:rPr lang="es-CL" sz="2400" b="1" dirty="0">
+              <a:t>ANALIZAR EL ROL DE LOS MODELOS GENERATIVOS EN EL DESARROLLO DE APLICACIONES, DESCRIBIENDO SUS TIPOS, CASOS DE USO, TECNOLOGÍAS ASOCIADAS Y REPRESENTANDO ARQUITECTURAS FUNCIONALES QUE INTEGREN ESTOS MODELOS MEDIANTE APIS.</a:t>
+            </a:r>
+          </a:p>
+          <a:p>
+            <a:pPr marL="0" indent="0">
+              <a:spcBef>
+                <a:spcPts val="1400"/>
+              </a:spcBef>
+              <a:buNone/>
+            </a:pPr>
+            <a:r>
+              <a:rPr lang="es-CL" sz="1200" b="1" dirty="0">
+                <a:solidFill>
+                  <a:srgbClr val="0E7490"/>
+                </a:solidFill>
+              </a:rPr>
+              <a:t>CRITERIOS DE EVALUACIÓN</a:t>
+            </a:r>
+          </a:p>
+          <a:p>
+            <a:pPr marL="342900" indent="-342900">
+              <a:spcBef>
+                <a:spcPts val="900"/>
+              </a:spcBef>
+              <a:buClr>
+                <a:srgbClr val="0E7490"/>
+              </a:buClr>
+              <a:buFont typeface="Arial"/>
+              <a:buChar char="•"/>
+            </a:pPr>
+            <a:r>
+              <a:rPr lang="es-CL" sz="1400" dirty="0">
                 <a:solidFill>
                   <a:srgbClr val="1F2937"/>
                 </a:solidFill>
               </a:rPr>
-              <a:t>produce contenido nuevo</a:t>
-            </a:r>
-            <a:r>
-              <a:rPr lang="es-CL" sz="2400" dirty="0">
+              <a:t>1.1 CLASIFICA LOS TIPOS DE MODELOS GENERATIVOS IDENTIFICANDO SUS CARACTERÍSTICAS Y APLICACIONES MÁS FRECUENTES EN LA ORGANIZACIÓN.</a:t>
+            </a:r>
+          </a:p>
+          <a:p>
+            <a:pPr marL="342900" indent="-342900">
+              <a:spcBef>
+                <a:spcPts val="900"/>
+              </a:spcBef>
+              <a:buClr>
+                <a:srgbClr val="0E7490"/>
+              </a:buClr>
+              <a:buFont typeface="Arial"/>
+              <a:buChar char="•"/>
+            </a:pPr>
+            <a:r>
+              <a:rPr lang="es-CL" sz="1400" dirty="0">
                 <a:solidFill>
                   <a:srgbClr val="1F2937"/>
                 </a:solidFill>
               </a:rPr>
-              <a:t> (texto, código, imágenes) aprendido de datos.</a:t>
+              <a:t>1.2 REPRESENTA UN DIAGRAMA FUNCIONAL DE UNA APLICACIÓN CON IA GENERATIVA, EXPLICANDO LA FUNCIÓN DE CADA COMPONENTE DENTRO DE LA ARQUITECTURA.</a:t>
+            </a:r>
+          </a:p>
+          <a:p>
+            <a:pPr marL="342900" indent="-342900">
+              <a:spcBef>
+                <a:spcPts val="900"/>
+              </a:spcBef>
+              <a:buClr>
+                <a:srgbClr val="0E7490"/>
+              </a:buClr>
+              <a:buFont typeface="Arial"/>
+              <a:buChar char="•"/>
+            </a:pPr>
+            <a:r>
+              <a:rPr lang="es-CL" sz="1400" dirty="0">
+                <a:solidFill>
+                  <a:srgbClr val="1F2937"/>
+                </a:solidFill>
+              </a:rPr>
+              <a:t>1.3 ANALIZA LA ELECCIÓN DE LA ARQUITECTURA EN FUNCIÓN DE CRITERIOS COMO ESCALABILIDAD, SEGURIDAD O MANTENIMIENTO.</a:t>
             </a:r>
           </a:p>
         </p:txBody>
@@ -1305,7 +1819,7 @@
                   <a:srgbClr val="6B7280"/>
                 </a:solidFill>
               </a:rPr>
-              <a:t>PF1822 · Módulo 2 · Cápsula 1 · AE1</a:t>
+              <a:t>PF1822 · Módulo 2 · Cápsula 1 · Aprendizaje esperado 1</a:t>
             </a:r>
           </a:p>
         </p:txBody>
@@ -1359,14 +1873,67 @@
       </p:sp>
       <p:sp>
         <p:nvSpPr>
+          <p:cNvPr id="7" name="Etiqueta"/>
+          <p:cNvSpPr txBox="1"/>
+          <p:nvPr/>
+        </p:nvSpPr>
+        <p:spPr>
+          <a:xfrm>
+            <a:off x="609600" y="228600"/>
+            <a:ext cx="7315200" cy="914400"/>
+          </a:xfrm>
+          <a:prstGeom prst="rect">
+            <a:avLst/>
+          </a:prstGeom>
+          <a:noFill/>
+        </p:spPr>
+        <p:txBody>
+          <a:bodyPr wrap="square" lIns="0" rIns="0" anchor="b">
+            <a:normAutofit/>
+          </a:bodyPr>
+          <a:lstStyle/>
+          <a:p>
+            <a:r>
+              <a:rPr lang="es-CL" sz="1200" b="1" dirty="0">
+                <a:solidFill>
+                  <a:srgbClr val="0E7490"/>
+                </a:solidFill>
+              </a:rPr>
+              <a:t>CONTENIDO DEL PLAN (TEXTUAL)</a:t>
+            </a:r>
+          </a:p>
+          <a:p>
+            <a:r>
+              <a:rPr lang="es-CL" sz="1200" b="1" dirty="0">
+                <a:solidFill>
+                  <a:srgbClr val="0F3D5E"/>
+                </a:solidFill>
+              </a:rPr>
+              <a:t>CONCEPTOS GENERALES DE IA GENERATIVA: QUÉ ES LA IA GENERATIVA Y PARA QUÉ SIRVE.</a:t>
+            </a:r>
+          </a:p>
+          <a:p>
+            <a:r>
+              <a:rPr lang="es-CL" sz="1200" b="1" dirty="0">
+                <a:solidFill>
+                  <a:srgbClr val="0F3D5E"/>
+                </a:solidFill>
+              </a:rPr>
+              <a:t>DIFERENCIAS ENTRE IA GENERATIVA Y IA TRADICIONAL BASADA EN REGLAS.</a:t>
+            </a:r>
+          </a:p>
+        </p:txBody>
+      </p:sp>
+      <p:sp>
+        <p:nvSpPr>
           <p:cNvPr id="3" name="Título"/>
           <p:cNvSpPr txBox="1"/>
           <p:nvPr/>
         </p:nvSpPr>
         <p:spPr>
           <a:xfrm>
-            <a:off x="609600" y="381000"/>
-            <a:ext cx="7315200" cy="990600"/>
+            <a:off x="609600" y="1181100"/>
+            <a:ext cx="7315200" cy="685800"/>
           </a:xfrm>
           <a:prstGeom prst="rect">
             <a:avLst/>
@@ -1380,12 +1947,12 @@
           <a:lstStyle/>
           <a:p>
             <a:r>
-              <a:rPr lang="es-CL" sz="3200" b="1" dirty="0">
+              <a:rPr lang="es-CL" sz="2800" b="1" dirty="0">
                 <a:solidFill>
                   <a:srgbClr val="0F3D5E"/>
                 </a:solidFill>
               </a:rPr>
-              <a:t>Tipos por lo que generan</a:t>
+              <a:t>IA generativa frente a IA tradicional</a:t>
             </a:r>
           </a:p>
         </p:txBody>
@@ -1398,7 +1965,7 @@
         </p:nvSpPr>
         <p:spPr>
           <a:xfrm>
-            <a:off x="609600" y="1447800"/>
+            <a:off x="609600" y="1943100"/>
             <a:ext cx="1066800" cy="50800"/>
           </a:xfrm>
           <a:prstGeom prst="rect">
@@ -1420,8 +1987,8 @@
         </p:nvSpPr>
         <p:spPr>
           <a:xfrm>
-            <a:off x="609600" y="1676400"/>
-            <a:ext cx="7315200" cy="4419600"/>
+            <a:off x="609600" y="2095500"/>
+            <a:ext cx="7315200" cy="4000500"/>
           </a:xfrm>
           <a:prstGeom prst="rect">
             <a:avLst/>
@@ -1450,7 +2017,23 @@
                   <a:srgbClr val="1F2937"/>
                 </a:solidFill>
               </a:rPr>
-              <a:t>Texto, imagen, audio y video.</a:t>
+              <a:t>La IA tradicional basada en reglas decide con condiciones escritas por personas; la generativa </a:t>
+            </a:r>
+            <a:r>
+              <a:rPr lang="es-CL" sz="2400" b="1" dirty="0">
+                <a:solidFill>
+                  <a:srgbClr val="1F2937"/>
+                </a:solidFill>
+              </a:rPr>
+              <a:t>produce contenido nuevo</a:t>
+            </a:r>
+            <a:r>
+              <a:rPr lang="es-CL" sz="2400" dirty="0">
+                <a:solidFill>
+                  <a:srgbClr val="1F2937"/>
+                </a:solidFill>
+              </a:rPr>
+              <a:t> (texto, código, imágenes) aprendido de datos.</a:t>
             </a:r>
           </a:p>
         </p:txBody>
@@ -1483,7 +2066,7 @@
                   <a:srgbClr val="6B7280"/>
                 </a:solidFill>
               </a:rPr>
-              <a:t>PF1822 · Módulo 2 · Cápsula 1 · AE1</a:t>
+              <a:t>PF1822 · Módulo 2 · Cápsula 1 · Aprendizaje esperado 1</a:t>
             </a:r>
           </a:p>
         </p:txBody>
@@ -1537,14 +2120,57 @@
       </p:sp>
       <p:sp>
         <p:nvSpPr>
+          <p:cNvPr id="7" name="Etiqueta"/>
+          <p:cNvSpPr txBox="1"/>
+          <p:nvPr/>
+        </p:nvSpPr>
+        <p:spPr>
+          <a:xfrm>
+            <a:off x="609600" y="228600"/>
+            <a:ext cx="7315200" cy="914400"/>
+          </a:xfrm>
+          <a:prstGeom prst="rect">
+            <a:avLst/>
+          </a:prstGeom>
+          <a:noFill/>
+        </p:spPr>
+        <p:txBody>
+          <a:bodyPr wrap="square" lIns="0" rIns="0" anchor="b">
+            <a:normAutofit/>
+          </a:bodyPr>
+          <a:lstStyle/>
+          <a:p>
+            <a:r>
+              <a:rPr lang="es-CL" sz="1200" b="1" dirty="0">
+                <a:solidFill>
+                  <a:srgbClr val="0E7490"/>
+                </a:solidFill>
+              </a:rPr>
+              <a:t>CONTENIDO DEL PLAN (TEXTUAL)</a:t>
+            </a:r>
+          </a:p>
+          <a:p>
+            <a:r>
+              <a:rPr lang="es-CL" sz="1200" b="1" dirty="0">
+                <a:solidFill>
+                  <a:srgbClr val="0F3D5E"/>
+                </a:solidFill>
+              </a:rPr>
+              <a:t>TIPOS DE IA GENERATIVA: TEXTO, IMAGEN, AUDIO Y VIDEO.</a:t>
+            </a:r>
+          </a:p>
+        </p:txBody>
+      </p:sp>
+      <p:sp>
+        <p:nvSpPr>
           <p:cNvPr id="3" name="Título"/>
           <p:cNvSpPr txBox="1"/>
           <p:nvPr/>
         </p:nvSpPr>
         <p:spPr>
           <a:xfrm>
-            <a:off x="609600" y="381000"/>
-            <a:ext cx="7315200" cy="990600"/>
+            <a:off x="609600" y="1181100"/>
+            <a:ext cx="7315200" cy="685800"/>
           </a:xfrm>
           <a:prstGeom prst="rect">
             <a:avLst/>
@@ -1558,12 +2184,12 @@
           <a:lstStyle/>
           <a:p>
             <a:r>
-              <a:rPr lang="es-CL" sz="3200" b="1" dirty="0">
+              <a:rPr lang="es-CL" sz="2800" b="1" dirty="0">
                 <a:solidFill>
                   <a:srgbClr val="0F3D5E"/>
                 </a:solidFill>
               </a:rPr>
-              <a:t>Familias técnicas</a:t>
+              <a:t>Tipos por lo que generan</a:t>
             </a:r>
           </a:p>
         </p:txBody>
@@ -1576,7 +2202,7 @@
         </p:nvSpPr>
         <p:spPr>
           <a:xfrm>
-            <a:off x="609600" y="1447800"/>
+            <a:off x="609600" y="1943100"/>
             <a:ext cx="1066800" cy="50800"/>
           </a:xfrm>
           <a:prstGeom prst="rect">
@@ -1598,8 +2224,8 @@
         </p:nvSpPr>
         <p:spPr>
           <a:xfrm>
-            <a:off x="609600" y="1676400"/>
-            <a:ext cx="7315200" cy="4419600"/>
+            <a:off x="609600" y="2095500"/>
+            <a:ext cx="7315200" cy="4000500"/>
           </a:xfrm>
           <a:prstGeom prst="rect">
             <a:avLst/>
@@ -1623,96 +2249,12 @@
               <a:buChar char="•"/>
             </a:pPr>
             <a:r>
-              <a:rPr lang="es-CL" sz="2000" b="1" dirty="0">
+              <a:rPr lang="es-CL" sz="2400" dirty="0">
                 <a:solidFill>
                   <a:srgbClr val="1F2937"/>
                 </a:solidFill>
               </a:rPr>
-              <a:t>Autorregresivos</a:t>
-            </a:r>
-            <a:r>
-              <a:rPr lang="es-CL" sz="2000" dirty="0">
-                <a:solidFill>
-                  <a:srgbClr val="1F2937"/>
-                </a:solidFill>
-              </a:rPr>
-              <a:t>: generan token a token (texto y código).</a:t>
-            </a:r>
-          </a:p>
-          <a:p>
-            <a:pPr marL="342900" indent="-342900">
-              <a:spcBef>
-                <a:spcPts val="900"/>
-              </a:spcBef>
-              <a:buClr>
-                <a:srgbClr val="0E7490"/>
-              </a:buClr>
-              <a:buFont typeface="Arial"/>
-              <a:buChar char="•"/>
-            </a:pPr>
-            <a:r>
-              <a:rPr lang="es-CL" sz="2000" b="1" dirty="0">
-                <a:solidFill>
-                  <a:srgbClr val="1F2937"/>
-                </a:solidFill>
-              </a:rPr>
-              <a:t>De difusión</a:t>
-            </a:r>
-            <a:r>
-              <a:rPr lang="es-CL" sz="2000" dirty="0">
-                <a:solidFill>
-                  <a:srgbClr val="1F2937"/>
-                </a:solidFill>
-              </a:rPr>
-              <a:t>: parten de ruido y lo refinan (imágenes, audio).</a:t>
-            </a:r>
-          </a:p>
-          <a:p>
-            <a:pPr marL="342900" indent="-342900">
-              <a:spcBef>
-                <a:spcPts val="900"/>
-              </a:spcBef>
-              <a:buClr>
-                <a:srgbClr val="0E7490"/>
-              </a:buClr>
-              <a:buFont typeface="Arial"/>
-              <a:buChar char="•"/>
-            </a:pPr>
-            <a:r>
-              <a:rPr lang="es-CL" sz="2000" b="1" dirty="0">
-                <a:solidFill>
-                  <a:srgbClr val="1F2937"/>
-                </a:solidFill>
-              </a:rPr>
-              <a:t>Transformers</a:t>
-            </a:r>
-            <a:r>
-              <a:rPr lang="es-CL" sz="2000" dirty="0">
-                <a:solidFill>
-                  <a:srgbClr val="1F2937"/>
-                </a:solidFill>
-              </a:rPr>
-              <a:t>: la arquitectura detrás de la mayoría de los modelos de lenguaje actuales.</a:t>
-            </a:r>
-          </a:p>
-          <a:p>
-            <a:pPr marL="342900" indent="-342900">
-              <a:spcBef>
-                <a:spcPts val="900"/>
-              </a:spcBef>
-              <a:buClr>
-                <a:srgbClr val="0E7490"/>
-              </a:buClr>
-              <a:buFont typeface="Arial"/>
-              <a:buChar char="•"/>
-            </a:pPr>
-            <a:r>
-              <a:rPr lang="es-CL" sz="2000" dirty="0">
-                <a:solidFill>
-                  <a:srgbClr val="1F2937"/>
-                </a:solidFill>
-              </a:rPr>
-              <a:t>Ver el cuadro R04.</a:t>
+              <a:t>Texto, imagen, audio y video.</a:t>
             </a:r>
           </a:p>
         </p:txBody>
@@ -1745,7 +2287,7 @@
                   <a:srgbClr val="6B7280"/>
                 </a:solidFill>
               </a:rPr>
-              <a:t>PF1822 · Módulo 2 · Cápsula 1 · AE1</a:t>
+              <a:t>PF1822 · Módulo 2 · Cápsula 1 · Aprendizaje esperado 1</a:t>
             </a:r>
           </a:p>
         </p:txBody>
@@ -1799,14 +2341,57 @@
       </p:sp>
       <p:sp>
         <p:nvSpPr>
+          <p:cNvPr id="7" name="Etiqueta"/>
+          <p:cNvSpPr txBox="1"/>
+          <p:nvPr/>
+        </p:nvSpPr>
+        <p:spPr>
+          <a:xfrm>
+            <a:off x="609600" y="228600"/>
+            <a:ext cx="7315200" cy="914400"/>
+          </a:xfrm>
+          <a:prstGeom prst="rect">
+            <a:avLst/>
+          </a:prstGeom>
+          <a:noFill/>
+        </p:spPr>
+        <p:txBody>
+          <a:bodyPr wrap="square" lIns="0" rIns="0" anchor="b">
+            <a:normAutofit/>
+          </a:bodyPr>
+          <a:lstStyle/>
+          <a:p>
+            <a:r>
+              <a:rPr lang="es-CL" sz="1200" b="1" dirty="0">
+                <a:solidFill>
+                  <a:srgbClr val="0E7490"/>
+                </a:solidFill>
+              </a:rPr>
+              <a:t>CONTENIDO DEL PLAN (TEXTUAL)</a:t>
+            </a:r>
+          </a:p>
+          <a:p>
+            <a:r>
+              <a:rPr lang="es-CL" sz="1200" b="1" dirty="0">
+                <a:solidFill>
+                  <a:srgbClr val="0F3D5E"/>
+                </a:solidFill>
+              </a:rPr>
+              <a:t>TIPOS DE MODELOS: AUTORREGRESIVOS, DE DIFUSIÓN Y BASADOS EN TRANSFORMERS.</a:t>
+            </a:r>
+          </a:p>
+        </p:txBody>
+      </p:sp>
+      <p:sp>
+        <p:nvSpPr>
           <p:cNvPr id="3" name="Título"/>
           <p:cNvSpPr txBox="1"/>
           <p:nvPr/>
         </p:nvSpPr>
         <p:spPr>
           <a:xfrm>
-            <a:off x="609600" y="381000"/>
-            <a:ext cx="7315200" cy="990600"/>
+            <a:off x="609600" y="1181100"/>
+            <a:ext cx="7315200" cy="685800"/>
           </a:xfrm>
           <a:prstGeom prst="rect">
             <a:avLst/>
@@ -1820,12 +2405,12 @@
           <a:lstStyle/>
           <a:p>
             <a:r>
-              <a:rPr lang="es-CL" sz="3200" b="1" dirty="0">
+              <a:rPr lang="es-CL" sz="2800" b="1" dirty="0">
                 <a:solidFill>
                   <a:srgbClr val="0F3D5E"/>
                 </a:solidFill>
               </a:rPr>
-              <a:t>Casos de uso</a:t>
+              <a:t>Familias técnicas</a:t>
             </a:r>
           </a:p>
         </p:txBody>
@@ -1838,7 +2423,7 @@
         </p:nvSpPr>
         <p:spPr>
           <a:xfrm>
-            <a:off x="609600" y="1447800"/>
+            <a:off x="609600" y="1943100"/>
             <a:ext cx="1066800" cy="50800"/>
           </a:xfrm>
           <a:prstGeom prst="rect">
@@ -1860,8 +2445,8 @@
         </p:nvSpPr>
         <p:spPr>
           <a:xfrm>
-            <a:off x="609600" y="1676400"/>
-            <a:ext cx="7315200" cy="4419600"/>
+            <a:off x="609600" y="2095500"/>
+            <a:ext cx="7315200" cy="4000500"/>
           </a:xfrm>
           <a:prstGeom prst="rect">
             <a:avLst/>
@@ -1885,12 +2470,96 @@
               <a:buChar char="•"/>
             </a:pPr>
             <a:r>
-              <a:rPr lang="es-CL" sz="2400" dirty="0">
+              <a:rPr lang="es-CL" sz="2000" b="1" dirty="0">
                 <a:solidFill>
                   <a:srgbClr val="1F2937"/>
                 </a:solidFill>
               </a:rPr>
-              <a:t>Generación de texto y de código, síntesis de imágenes, preguntas y respuestas, resúmenes, generación de pruebas.</a:t>
+              <a:t>Autorregresivos</a:t>
+            </a:r>
+            <a:r>
+              <a:rPr lang="es-CL" sz="2000" dirty="0">
+                <a:solidFill>
+                  <a:srgbClr val="1F2937"/>
+                </a:solidFill>
+              </a:rPr>
+              <a:t>: generan token a token (texto y código).</a:t>
+            </a:r>
+          </a:p>
+          <a:p>
+            <a:pPr marL="342900" indent="-342900">
+              <a:spcBef>
+                <a:spcPts val="900"/>
+              </a:spcBef>
+              <a:buClr>
+                <a:srgbClr val="0E7490"/>
+              </a:buClr>
+              <a:buFont typeface="Arial"/>
+              <a:buChar char="•"/>
+            </a:pPr>
+            <a:r>
+              <a:rPr lang="es-CL" sz="2000" b="1" dirty="0">
+                <a:solidFill>
+                  <a:srgbClr val="1F2937"/>
+                </a:solidFill>
+              </a:rPr>
+              <a:t>De difusión</a:t>
+            </a:r>
+            <a:r>
+              <a:rPr lang="es-CL" sz="2000" dirty="0">
+                <a:solidFill>
+                  <a:srgbClr val="1F2937"/>
+                </a:solidFill>
+              </a:rPr>
+              <a:t>: parten de ruido y lo refinan (imágenes, audio).</a:t>
+            </a:r>
+          </a:p>
+          <a:p>
+            <a:pPr marL="342900" indent="-342900">
+              <a:spcBef>
+                <a:spcPts val="900"/>
+              </a:spcBef>
+              <a:buClr>
+                <a:srgbClr val="0E7490"/>
+              </a:buClr>
+              <a:buFont typeface="Arial"/>
+              <a:buChar char="•"/>
+            </a:pPr>
+            <a:r>
+              <a:rPr lang="es-CL" sz="2000" b="1" dirty="0">
+                <a:solidFill>
+                  <a:srgbClr val="1F2937"/>
+                </a:solidFill>
+              </a:rPr>
+              <a:t>Transformers</a:t>
+            </a:r>
+            <a:r>
+              <a:rPr lang="es-CL" sz="2000" dirty="0">
+                <a:solidFill>
+                  <a:srgbClr val="1F2937"/>
+                </a:solidFill>
+              </a:rPr>
+              <a:t>: la arquitectura detrás de la mayoría de los modelos de lenguaje actuales.</a:t>
+            </a:r>
+          </a:p>
+          <a:p>
+            <a:pPr marL="342900" indent="-342900">
+              <a:spcBef>
+                <a:spcPts val="900"/>
+              </a:spcBef>
+              <a:buClr>
+                <a:srgbClr val="0E7490"/>
+              </a:buClr>
+              <a:buFont typeface="Arial"/>
+              <a:buChar char="•"/>
+            </a:pPr>
+            <a:r>
+              <a:rPr lang="es-CL" sz="2000" dirty="0">
+                <a:solidFill>
+                  <a:srgbClr val="1F2937"/>
+                </a:solidFill>
+              </a:rPr>
+              <a:t>Ver el cuadro R04.</a:t>
             </a:r>
           </a:p>
         </p:txBody>
@@ -1923,7 +2592,7 @@
                   <a:srgbClr val="6B7280"/>
                 </a:solidFill>
               </a:rPr>
-              <a:t>PF1822 · Módulo 2 · Cápsula 1 · AE1</a:t>
+              <a:t>PF1822 · Módulo 2 · Cápsula 1 · Aprendizaje esperado 1</a:t>
             </a:r>
           </a:p>
         </p:txBody>
@@ -1977,14 +2646,57 @@
       </p:sp>
       <p:sp>
         <p:nvSpPr>
+          <p:cNvPr id="7" name="Etiqueta"/>
+          <p:cNvSpPr txBox="1"/>
+          <p:nvPr/>
+        </p:nvSpPr>
+        <p:spPr>
+          <a:xfrm>
+            <a:off x="609600" y="228600"/>
+            <a:ext cx="7315200" cy="914400"/>
+          </a:xfrm>
+          <a:prstGeom prst="rect">
+            <a:avLst/>
+          </a:prstGeom>
+          <a:noFill/>
+        </p:spPr>
+        <p:txBody>
+          <a:bodyPr wrap="square" lIns="0" rIns="0" anchor="b">
+            <a:normAutofit/>
+          </a:bodyPr>
+          <a:lstStyle/>
+          <a:p>
+            <a:r>
+              <a:rPr lang="es-CL" sz="1200" b="1" dirty="0">
+                <a:solidFill>
+                  <a:srgbClr val="0E7490"/>
+                </a:solidFill>
+              </a:rPr>
+              <a:t>CONTENIDO DEL PLAN (TEXTUAL)</a:t>
+            </a:r>
+          </a:p>
+          <a:p>
+            <a:r>
+              <a:rPr lang="es-CL" sz="1200" b="1" dirty="0">
+                <a:solidFill>
+                  <a:srgbClr val="0F3D5E"/>
+                </a:solidFill>
+              </a:rPr>
+              <a:t>CASOS DE USO: GENERACIÓN DE TEXTO, GENERACIÓN DE CÓDIGO, SÍNTESIS DE IMÁGENES, QA, SUMMARIZATION Y GENERACIÓN DE TESTS.</a:t>
+            </a:r>
+          </a:p>
+        </p:txBody>
+      </p:sp>
+      <p:sp>
+        <p:nvSpPr>
           <p:cNvPr id="3" name="Título"/>
           <p:cNvSpPr txBox="1"/>
           <p:nvPr/>
         </p:nvSpPr>
         <p:spPr>
           <a:xfrm>
-            <a:off x="609600" y="381000"/>
-            <a:ext cx="7315200" cy="990600"/>
+            <a:off x="609600" y="1181100"/>
+            <a:ext cx="7315200" cy="685800"/>
           </a:xfrm>
           <a:prstGeom prst="rect">
             <a:avLst/>
@@ -1998,12 +2710,12 @@
           <a:lstStyle/>
           <a:p>
             <a:r>
-              <a:rPr lang="es-CL" sz="3200" b="1" dirty="0">
+              <a:rPr lang="es-CL" sz="2800" b="1" dirty="0">
                 <a:solidFill>
                   <a:srgbClr val="0F3D5E"/>
                 </a:solidFill>
               </a:rPr>
-              <a:t>Arquitecturas</a:t>
+              <a:t>Casos de uso</a:t>
             </a:r>
           </a:p>
         </p:txBody>
@@ -2016,7 +2728,7 @@
         </p:nvSpPr>
         <p:spPr>
           <a:xfrm>
-            <a:off x="609600" y="1447800"/>
+            <a:off x="609600" y="1943100"/>
             <a:ext cx="1066800" cy="50800"/>
           </a:xfrm>
           <a:prstGeom prst="rect">
@@ -2038,8 +2750,8 @@
         </p:nvSpPr>
         <p:spPr>
           <a:xfrm>
-            <a:off x="609600" y="1676400"/>
-            <a:ext cx="7315200" cy="4419600"/>
+            <a:off x="609600" y="2095500"/>
+            <a:ext cx="7315200" cy="4000500"/>
           </a:xfrm>
           <a:prstGeom prst="rect">
             <a:avLst/>
@@ -2063,36 +2775,12 @@
               <a:buChar char="•"/>
             </a:pPr>
             <a:r>
-              <a:rPr lang="es-CL" sz="2400" b="1" dirty="0">
+              <a:rPr lang="es-CL" sz="2400" dirty="0">
                 <a:solidFill>
                   <a:srgbClr val="1F2937"/>
                 </a:solidFill>
               </a:rPr>
-              <a:t>Solicitud–respuesta</a:t>
-            </a:r>
-            <a:r>
-              <a:rPr lang="es-CL" sz="2400" dirty="0">
-                <a:solidFill>
-                  <a:srgbClr val="1F2937"/>
-                </a:solidFill>
-              </a:rPr>
-              <a:t> (una llamada, una respuesta) y </a:t>
-            </a:r>
-            <a:r>
-              <a:rPr lang="es-CL" sz="2400" b="1" dirty="0">
-                <a:solidFill>
-                  <a:srgbClr val="1F2937"/>
-                </a:solidFill>
-              </a:rPr>
-              <a:t>pipelines</a:t>
-            </a:r>
-            <a:r>
-              <a:rPr lang="es-CL" sz="2400" dirty="0">
-                <a:solidFill>
-                  <a:srgbClr val="1F2937"/>
-                </a:solidFill>
-              </a:rPr>
-              <a:t> (varias etapas encadenadas: limpiar → generar → evaluar → guardar).</a:t>
+              <a:t>Generación de texto y de código, síntesis de imágenes, preguntas y respuestas, resúmenes, generación de pruebas.</a:t>
             </a:r>
           </a:p>
         </p:txBody>
@@ -2125,7 +2813,7 @@
                   <a:srgbClr val="6B7280"/>
                 </a:solidFill>
               </a:rPr>
-              <a:t>PF1822 · Módulo 2 · Cápsula 1 · AE1</a:t>
+              <a:t>PF1822 · Módulo 2 · Cápsula 1 · Aprendizaje esperado 1</a:t>
             </a:r>
           </a:p>
         </p:txBody>
@@ -2179,14 +2867,57 @@
       </p:sp>
       <p:sp>
         <p:nvSpPr>
+          <p:cNvPr id="7" name="Etiqueta"/>
+          <p:cNvSpPr txBox="1"/>
+          <p:nvPr/>
+        </p:nvSpPr>
+        <p:spPr>
+          <a:xfrm>
+            <a:off x="609600" y="228600"/>
+            <a:ext cx="7315200" cy="914400"/>
+          </a:xfrm>
+          <a:prstGeom prst="rect">
+            <a:avLst/>
+          </a:prstGeom>
+          <a:noFill/>
+        </p:spPr>
+        <p:txBody>
+          <a:bodyPr wrap="square" lIns="0" rIns="0" anchor="b">
+            <a:normAutofit/>
+          </a:bodyPr>
+          <a:lstStyle/>
+          <a:p>
+            <a:r>
+              <a:rPr lang="es-CL" sz="1200" b="1" dirty="0">
+                <a:solidFill>
+                  <a:srgbClr val="0E7490"/>
+                </a:solidFill>
+              </a:rPr>
+              <a:t>CONTENIDO DEL PLAN (TEXTUAL)</a:t>
+            </a:r>
+          </a:p>
+          <a:p>
+            <a:r>
+              <a:rPr lang="es-CL" sz="1200" b="1" dirty="0">
+                <a:solidFill>
+                  <a:srgbClr val="0F3D5E"/>
+                </a:solidFill>
+              </a:rPr>
+              <a:t>ARQUITECTURAS: REQUEST–RESPONSE Y PIPELINES.</a:t>
+            </a:r>
+          </a:p>
+        </p:txBody>
+      </p:sp>
+      <p:sp>
+        <p:nvSpPr>
           <p:cNvPr id="3" name="Título"/>
           <p:cNvSpPr txBox="1"/>
           <p:nvPr/>
         </p:nvSpPr>
         <p:spPr>
           <a:xfrm>
-            <a:off x="609600" y="381000"/>
-            <a:ext cx="7315200" cy="990600"/>
+            <a:off x="609600" y="1181100"/>
+            <a:ext cx="7315200" cy="685800"/>
           </a:xfrm>
           <a:prstGeom prst="rect">
             <a:avLst/>
@@ -2200,12 +2931,12 @@
           <a:lstStyle/>
           <a:p>
             <a:r>
-              <a:rPr lang="es-CL" sz="3200" b="1" dirty="0">
+              <a:rPr lang="es-CL" sz="2800" b="1" dirty="0">
                 <a:solidFill>
                   <a:srgbClr val="0F3D5E"/>
                 </a:solidFill>
               </a:rPr>
-              <a:t>Componentes</a:t>
+              <a:t>Arquitecturas</a:t>
             </a:r>
           </a:p>
         </p:txBody>
@@ -2218,7 +2949,7 @@
         </p:nvSpPr>
         <p:spPr>
           <a:xfrm>
-            <a:off x="609600" y="1447800"/>
+            <a:off x="609600" y="1943100"/>
             <a:ext cx="1066800" cy="50800"/>
           </a:xfrm>
           <a:prstGeom prst="rect">
@@ -2240,8 +2971,8 @@
         </p:nvSpPr>
         <p:spPr>
           <a:xfrm>
-            <a:off x="609600" y="1676400"/>
-            <a:ext cx="7315200" cy="4419600"/>
+            <a:off x="609600" y="2095500"/>
+            <a:ext cx="7315200" cy="4000500"/>
           </a:xfrm>
           <a:prstGeom prst="rect">
             <a:avLst/>
@@ -2265,32 +2996,36 @@
               <a:buChar char="•"/>
             </a:pPr>
             <a:r>
+              <a:rPr lang="es-CL" sz="2400" b="1" dirty="0">
+                <a:solidFill>
+                  <a:srgbClr val="1F2937"/>
+                </a:solidFill>
+              </a:rPr>
+              <a:t>Solicitud–respuesta</a:t>
+            </a:r>
+            <a:r>
               <a:rPr lang="es-CL" sz="2400" dirty="0">
                 <a:solidFill>
                   <a:srgbClr val="1F2937"/>
                 </a:solidFill>
               </a:rPr>
-              <a:t>Cliente · servidor API · módulo de preprocesamiento · modelo de IA · base de datos o vector store.</a:t>
-            </a:r>
-          </a:p>
-          <a:p>
-            <a:pPr marL="342900" indent="-342900">
-              <a:spcBef>
-                <a:spcPts val="900"/>
-              </a:spcBef>
-              <a:buClr>
-                <a:srgbClr val="0E7490"/>
-              </a:buClr>
-              <a:buFont typeface="Arial"/>
-              <a:buChar char="•"/>
-            </a:pPr>
+              <a:t> (una llamada, una respuesta) y </a:t>
+            </a:r>
+            <a:r>
+              <a:rPr lang="es-CL" sz="2400" b="1" dirty="0">
+                <a:solidFill>
+                  <a:srgbClr val="1F2937"/>
+                </a:solidFill>
+              </a:rPr>
+              <a:t>pipelines</a:t>
+            </a:r>
             <a:r>
               <a:rPr lang="es-CL" sz="2400" dirty="0">
                 <a:solidFill>
                   <a:srgbClr val="1F2937"/>
                 </a:solidFill>
               </a:rPr>
-              <a:t>Flujo de datos de extremo a extremo con el ticket de ejemplo.</a:t>
+              <a:t> (varias etapas encadenadas: limpiar → generar → evaluar → guardar).</a:t>
             </a:r>
           </a:p>
         </p:txBody>
@@ -2323,7 +3058,7 @@
                   <a:srgbClr val="6B7280"/>
                 </a:solidFill>
               </a:rPr>
-              <a:t>PF1822 · Módulo 2 · Cápsula 1 · AE1</a:t>
+              <a:t>PF1822 · Módulo 2 · Cápsula 1 · Aprendizaje esperado 1</a:t>
             </a:r>
           </a:p>
         </p:txBody>
@@ -2377,14 +3112,67 @@
       </p:sp>
       <p:sp>
         <p:nvSpPr>
+          <p:cNvPr id="7" name="Etiqueta"/>
+          <p:cNvSpPr txBox="1"/>
+          <p:nvPr/>
+        </p:nvSpPr>
+        <p:spPr>
+          <a:xfrm>
+            <a:off x="609600" y="228600"/>
+            <a:ext cx="7315200" cy="914400"/>
+          </a:xfrm>
+          <a:prstGeom prst="rect">
+            <a:avLst/>
+          </a:prstGeom>
+          <a:noFill/>
+        </p:spPr>
+        <p:txBody>
+          <a:bodyPr wrap="square" lIns="0" rIns="0" anchor="b">
+            <a:normAutofit/>
+          </a:bodyPr>
+          <a:lstStyle/>
+          <a:p>
+            <a:r>
+              <a:rPr lang="es-CL" sz="1200" b="1" dirty="0">
+                <a:solidFill>
+                  <a:srgbClr val="0E7490"/>
+                </a:solidFill>
+              </a:rPr>
+              <a:t>CONTENIDO DEL PLAN (TEXTUAL)</a:t>
+            </a:r>
+          </a:p>
+          <a:p>
+            <a:r>
+              <a:rPr lang="es-CL" sz="1200" b="1" dirty="0">
+                <a:solidFill>
+                  <a:srgbClr val="0F3D5E"/>
+                </a:solidFill>
+              </a:rPr>
+              <a:t>COMPONENTES: CLIENTE, SERVIDOR API, MODELO DE IA, MÓDULO DE PREPROCESAMIENTO Y BASE DE DATOS/VECTOR STORE.</a:t>
+            </a:r>
+          </a:p>
+          <a:p>
+            <a:r>
+              <a:rPr lang="es-CL" sz="1200" b="1" dirty="0">
+                <a:solidFill>
+                  <a:srgbClr val="0F3D5E"/>
+                </a:solidFill>
+              </a:rPr>
+              <a:t>FLUJO DE DATOS END-TO-END: TECNOLOGÍAS Y LIBRERÍAS: OPENAI API, HUGGING FACE TRANSFORMERS, TENSORFLOW, PYTORCH, LANGCHAIN Y DIFFUSERS.</a:t>
+            </a:r>
+          </a:p>
+        </p:txBody>
+      </p:sp>
+      <p:sp>
+        <p:nvSpPr>
           <p:cNvPr id="3" name="Título"/>
           <p:cNvSpPr txBox="1"/>
           <p:nvPr/>
         </p:nvSpPr>
         <p:spPr>
           <a:xfrm>
-            <a:off x="609600" y="381000"/>
-            <a:ext cx="7315200" cy="990600"/>
+            <a:off x="609600" y="1181100"/>
+            <a:ext cx="7315200" cy="685800"/>
           </a:xfrm>
           <a:prstGeom prst="rect">
             <a:avLst/>
@@ -2398,12 +3186,12 @@
           <a:lstStyle/>
           <a:p>
             <a:r>
-              <a:rPr lang="es-CL" sz="3200" b="1" dirty="0">
+              <a:rPr lang="es-CL" sz="2800" b="1" dirty="0">
                 <a:solidFill>
                   <a:srgbClr val="0F3D5E"/>
                 </a:solidFill>
               </a:rPr>
-              <a:t>Tecnologías y bibliotecas</a:t>
+              <a:t>Componentes</a:t>
             </a:r>
           </a:p>
         </p:txBody>
@@ -2416,7 +3204,7 @@
         </p:nvSpPr>
         <p:spPr>
           <a:xfrm>
-            <a:off x="609600" y="1447800"/>
+            <a:off x="609600" y="1943100"/>
             <a:ext cx="1066800" cy="50800"/>
           </a:xfrm>
           <a:prstGeom prst="rect">
@@ -2438,8 +3226,8 @@
         </p:nvSpPr>
         <p:spPr>
           <a:xfrm>
-            <a:off x="609600" y="1676400"/>
-            <a:ext cx="7315200" cy="4419600"/>
+            <a:off x="609600" y="2095500"/>
+            <a:ext cx="7315200" cy="4000500"/>
           </a:xfrm>
           <a:prstGeom prst="rect">
             <a:avLst/>
@@ -2468,7 +3256,27 @@
                   <a:srgbClr val="1F2937"/>
                 </a:solidFill>
               </a:rPr>
-              <a:t>API de OpenAI · Hugging Face Transformers · TensorFlow · PyTorch · LangChain · Diffusers: qué resuelve cada una y en qué módulo del plan se vuelve a ver.</a:t>
+              <a:t>Cliente · servidor API · módulo de preprocesamiento · modelo de IA · base de datos o vector store.</a:t>
+            </a:r>
+          </a:p>
+          <a:p>
+            <a:pPr marL="342900" indent="-342900">
+              <a:spcBef>
+                <a:spcPts val="900"/>
+              </a:spcBef>
+              <a:buClr>
+                <a:srgbClr val="0E7490"/>
+              </a:buClr>
+              <a:buFont typeface="Arial"/>
+              <a:buChar char="•"/>
+            </a:pPr>
+            <a:r>
+              <a:rPr lang="es-CL" sz="2400" dirty="0">
+                <a:solidFill>
+                  <a:srgbClr val="1F2937"/>
+                </a:solidFill>
+              </a:rPr>
+              <a:t>Flujo de datos de extremo a extremo con el ticket de ejemplo.</a:t>
             </a:r>
           </a:p>
         </p:txBody>
@@ -2501,7 +3309,7 @@
                   <a:srgbClr val="6B7280"/>
                 </a:solidFill>
               </a:rPr>
-              <a:t>PF1822 · Módulo 2 · Cápsula 1 · AE1</a:t>
+              <a:t>PF1822 · Módulo 2 · Cápsula 1 · Aprendizaje esperado 1</a:t>
             </a:r>
           </a:p>
         </p:txBody>
@@ -2555,14 +3363,67 @@
       </p:sp>
       <p:sp>
         <p:nvSpPr>
+          <p:cNvPr id="7" name="Etiqueta"/>
+          <p:cNvSpPr txBox="1"/>
+          <p:nvPr/>
+        </p:nvSpPr>
+        <p:spPr>
+          <a:xfrm>
+            <a:off x="609600" y="228600"/>
+            <a:ext cx="7315200" cy="914400"/>
+          </a:xfrm>
+          <a:prstGeom prst="rect">
+            <a:avLst/>
+          </a:prstGeom>
+          <a:noFill/>
+        </p:spPr>
+        <p:txBody>
+          <a:bodyPr wrap="square" lIns="0" rIns="0" anchor="b">
+            <a:normAutofit/>
+          </a:bodyPr>
+          <a:lstStyle/>
+          <a:p>
+            <a:r>
+              <a:rPr lang="es-CL" sz="1200" b="1" dirty="0">
+                <a:solidFill>
+                  <a:srgbClr val="0E7490"/>
+                </a:solidFill>
+              </a:rPr>
+              <a:t>CONTENIDO DEL PLAN (TEXTUAL)</a:t>
+            </a:r>
+          </a:p>
+          <a:p>
+            <a:r>
+              <a:rPr lang="es-CL" sz="1200" b="1" dirty="0">
+                <a:solidFill>
+                  <a:srgbClr val="0F3D5E"/>
+                </a:solidFill>
+              </a:rPr>
+              <a:t>ECOSISTEMA TECNOLÓGICO DE LA IA.</a:t>
+            </a:r>
+          </a:p>
+          <a:p>
+            <a:r>
+              <a:rPr lang="es-CL" sz="1200" b="1" dirty="0">
+                <a:solidFill>
+                  <a:srgbClr val="0F3D5E"/>
+                </a:solidFill>
+              </a:rPr>
+              <a:t>FLUJO DE DATOS END-TO-END: TECNOLOGÍAS Y LIBRERÍAS: OPENAI API, HUGGING FACE TRANSFORMERS, TENSORFLOW, PYTORCH, LANGCHAIN Y DIFFUSERS.</a:t>
+            </a:r>
+          </a:p>
+        </p:txBody>
+      </p:sp>
+      <p:sp>
+        <p:nvSpPr>
           <p:cNvPr id="3" name="Título"/>
           <p:cNvSpPr txBox="1"/>
           <p:nvPr/>
         </p:nvSpPr>
         <p:spPr>
           <a:xfrm>
-            <a:off x="609600" y="381000"/>
-            <a:ext cx="7315200" cy="990600"/>
+            <a:off x="609600" y="1181100"/>
+            <a:ext cx="7315200" cy="685800"/>
           </a:xfrm>
           <a:prstGeom prst="rect">
             <a:avLst/>
@@ -2576,12 +3437,12 @@
           <a:lstStyle/>
           <a:p>
             <a:r>
-              <a:rPr lang="es-CL" sz="3200" b="1" dirty="0">
+              <a:rPr lang="es-CL" sz="2800" b="1" dirty="0">
                 <a:solidFill>
                   <a:srgbClr val="0F3D5E"/>
                 </a:solidFill>
               </a:rPr>
-              <a:t>Elegir una arquitectura</a:t>
+              <a:t>Tecnologías y bibliotecas</a:t>
             </a:r>
           </a:p>
         </p:txBody>
@@ -2594,7 +3455,7 @@
         </p:nvSpPr>
         <p:spPr>
           <a:xfrm>
-            <a:off x="609600" y="1447800"/>
+            <a:off x="609600" y="1943100"/>
             <a:ext cx="1066800" cy="50800"/>
           </a:xfrm>
           <a:prstGeom prst="rect">
@@ -2616,8 +3477,8 @@
         </p:nvSpPr>
         <p:spPr>
           <a:xfrm>
-            <a:off x="609600" y="1676400"/>
-            <a:ext cx="7315200" cy="4419600"/>
+            <a:off x="609600" y="2095500"/>
+            <a:ext cx="7315200" cy="4000500"/>
           </a:xfrm>
           <a:prstGeom prst="rect">
             <a:avLst/>
@@ -2641,76 +3502,12 @@
               <a:buChar char="•"/>
             </a:pPr>
             <a:r>
-              <a:rPr lang="es-CL" sz="2000" dirty="0">
+              <a:rPr lang="es-CL" sz="2400" dirty="0">
                 <a:solidFill>
                   <a:srgbClr val="1F2937"/>
                 </a:solidFill>
               </a:rPr>
-              <a:t>Criterios: </a:t>
-            </a:r>
-            <a:r>
-              <a:rPr lang="es-CL" sz="2000" b="1" dirty="0">
-                <a:solidFill>
-                  <a:srgbClr val="1F2937"/>
-                </a:solidFill>
-              </a:rPr>
-              <a:t>escalabilidad</a:t>
-            </a:r>
-            <a:r>
-              <a:rPr lang="es-CL" sz="2000" dirty="0">
-                <a:solidFill>
-                  <a:srgbClr val="1F2937"/>
-                </a:solidFill>
-              </a:rPr>
-              <a:t> (¿aguanta 10 veces más tickets?), </a:t>
-            </a:r>
-            <a:r>
-              <a:rPr lang="es-CL" sz="2000" b="1" dirty="0">
-                <a:solidFill>
-                  <a:srgbClr val="1F2937"/>
-                </a:solidFill>
-              </a:rPr>
-              <a:t>seguridad</a:t>
-            </a:r>
-            <a:r>
-              <a:rPr lang="es-CL" sz="2000" dirty="0">
-                <a:solidFill>
-                  <a:srgbClr val="1F2937"/>
-                </a:solidFill>
-              </a:rPr>
-              <a:t> (¿dónde están la clave y los datos personales?), </a:t>
-            </a:r>
-            <a:r>
-              <a:rPr lang="es-CL" sz="2000" b="1" dirty="0">
-                <a:solidFill>
-                  <a:srgbClr val="1F2937"/>
-                </a:solidFill>
-              </a:rPr>
-              <a:t>costo</a:t>
-            </a:r>
-            <a:r>
-              <a:rPr lang="es-CL" sz="2000" dirty="0">
-                <a:solidFill>
-                  <a:srgbClr val="1F2937"/>
-                </a:solidFill>
-              </a:rPr>
-              <a:t> (tokens por ticket) y </a:t>
-            </a:r>
-            <a:r>
-              <a:rPr lang="es-CL" sz="2000" b="1" dirty="0">
-                <a:solidFill>
-                  <a:srgbClr val="1F2937"/>
-                </a:solidFill>
-              </a:rPr>
-              <a:t>mantenimiento</a:t>
-            </a:r>
-            <a:r>
-              <a:rPr lang="es-CL" sz="2000" dirty="0">
-                <a:solidFill>
-                  <a:srgbClr val="1F2937"/>
-                </a:solidFill>
-              </a:rPr>
-              <a:t> (¿se puede cambiar de modelo sin reescribir todo?).</a:t>
+              <a:t>API de OpenAI · Hugging Face Transformers · TensorFlow · PyTorch · LangChain · Diffusers: qué resuelve cada una y en qué módulo del plan se vuelve a ver.</a:t>
             </a:r>
           </a:p>
         </p:txBody>
@@ -2743,7 +3540,7 @@
                   <a:srgbClr val="6B7280"/>
                 </a:solidFill>
               </a:rPr>
-              <a:t>PF1822 · Módulo 2 · Cápsula 1 · AE1</a:t>
+              <a:t>PF1822 · Módulo 2 · Cápsula 1 · Aprendizaje esperado 1</a:t>
             </a:r>
           </a:p>
         </p:txBody>
